--- a/.lessons/21 Fundamental CRUD/7 Retrieving All Data From Database Table/1.pptx
+++ b/.lessons/21 Fundamental CRUD/7 Retrieving All Data From Database Table/1.pptx
@@ -8,7 +8,10 @@
     <p:sldId id="401" r:id="rId2"/>
     <p:sldId id="402" r:id="rId3"/>
     <p:sldId id="403" r:id="rId4"/>
-    <p:sldId id="400" r:id="rId5"/>
+    <p:sldId id="404" r:id="rId5"/>
+    <p:sldId id="405" r:id="rId6"/>
+    <p:sldId id="406" r:id="rId7"/>
+    <p:sldId id="400" r:id="rId8"/>
   </p:sldIdLst>
   <p:sldSz cx="12192000" cy="6858000"/>
   <p:notesSz cx="6858000" cy="9144000"/>
@@ -262,7 +265,7 @@
           <a:p>
             <a:fld id="{3E102D2E-813C-461C-9963-687A650C48C0}" type="datetimeFigureOut">
               <a:rPr lang="en-US" smtClean="0"/>
-              <a:t>4/26/2025</a:t>
+              <a:t>5/16/2025</a:t>
             </a:fld>
             <a:endParaRPr lang="en-US"/>
           </a:p>
@@ -460,7 +463,7 @@
           <a:p>
             <a:fld id="{3E102D2E-813C-461C-9963-687A650C48C0}" type="datetimeFigureOut">
               <a:rPr lang="en-US" smtClean="0"/>
-              <a:t>4/26/2025</a:t>
+              <a:t>5/16/2025</a:t>
             </a:fld>
             <a:endParaRPr lang="en-US"/>
           </a:p>
@@ -668,7 +671,7 @@
           <a:p>
             <a:fld id="{3E102D2E-813C-461C-9963-687A650C48C0}" type="datetimeFigureOut">
               <a:rPr lang="en-US" smtClean="0"/>
-              <a:t>4/26/2025</a:t>
+              <a:t>5/16/2025</a:t>
             </a:fld>
             <a:endParaRPr lang="en-US"/>
           </a:p>
@@ -866,7 +869,7 @@
           <a:p>
             <a:fld id="{3E102D2E-813C-461C-9963-687A650C48C0}" type="datetimeFigureOut">
               <a:rPr lang="en-US" smtClean="0"/>
-              <a:t>4/26/2025</a:t>
+              <a:t>5/16/2025</a:t>
             </a:fld>
             <a:endParaRPr lang="en-US"/>
           </a:p>
@@ -1141,7 +1144,7 @@
           <a:p>
             <a:fld id="{3E102D2E-813C-461C-9963-687A650C48C0}" type="datetimeFigureOut">
               <a:rPr lang="en-US" smtClean="0"/>
-              <a:t>4/26/2025</a:t>
+              <a:t>5/16/2025</a:t>
             </a:fld>
             <a:endParaRPr lang="en-US"/>
           </a:p>
@@ -1406,7 +1409,7 @@
           <a:p>
             <a:fld id="{3E102D2E-813C-461C-9963-687A650C48C0}" type="datetimeFigureOut">
               <a:rPr lang="en-US" smtClean="0"/>
-              <a:t>4/26/2025</a:t>
+              <a:t>5/16/2025</a:t>
             </a:fld>
             <a:endParaRPr lang="en-US"/>
           </a:p>
@@ -1818,7 +1821,7 @@
           <a:p>
             <a:fld id="{3E102D2E-813C-461C-9963-687A650C48C0}" type="datetimeFigureOut">
               <a:rPr lang="en-US" smtClean="0"/>
-              <a:t>4/26/2025</a:t>
+              <a:t>5/16/2025</a:t>
             </a:fld>
             <a:endParaRPr lang="en-US"/>
           </a:p>
@@ -1959,7 +1962,7 @@
           <a:p>
             <a:fld id="{3E102D2E-813C-461C-9963-687A650C48C0}" type="datetimeFigureOut">
               <a:rPr lang="en-US" smtClean="0"/>
-              <a:t>4/26/2025</a:t>
+              <a:t>5/16/2025</a:t>
             </a:fld>
             <a:endParaRPr lang="en-US"/>
           </a:p>
@@ -2072,7 +2075,7 @@
           <a:p>
             <a:fld id="{3E102D2E-813C-461C-9963-687A650C48C0}" type="datetimeFigureOut">
               <a:rPr lang="en-US" smtClean="0"/>
-              <a:t>4/26/2025</a:t>
+              <a:t>5/16/2025</a:t>
             </a:fld>
             <a:endParaRPr lang="en-US"/>
           </a:p>
@@ -2383,7 +2386,7 @@
           <a:p>
             <a:fld id="{3E102D2E-813C-461C-9963-687A650C48C0}" type="datetimeFigureOut">
               <a:rPr lang="en-US" smtClean="0"/>
-              <a:t>4/26/2025</a:t>
+              <a:t>5/16/2025</a:t>
             </a:fld>
             <a:endParaRPr lang="en-US"/>
           </a:p>
@@ -2671,7 +2674,7 @@
           <a:p>
             <a:fld id="{3E102D2E-813C-461C-9963-687A650C48C0}" type="datetimeFigureOut">
               <a:rPr lang="en-US" smtClean="0"/>
-              <a:t>4/26/2025</a:t>
+              <a:t>5/16/2025</a:t>
             </a:fld>
             <a:endParaRPr lang="en-US"/>
           </a:p>
@@ -2912,7 +2915,7 @@
           <a:p>
             <a:fld id="{3E102D2E-813C-461C-9963-687A650C48C0}" type="datetimeFigureOut">
               <a:rPr lang="en-US" smtClean="0"/>
-              <a:t>4/26/2025</a:t>
+              <a:t>5/16/2025</a:t>
             </a:fld>
             <a:endParaRPr lang="en-US"/>
           </a:p>
@@ -3350,7 +3353,7 @@
         <p:spPr>
           <a:xfrm>
             <a:off x="217714" y="255046"/>
-            <a:ext cx="11756571" cy="355354"/>
+            <a:ext cx="11756571" cy="3681777"/>
           </a:xfrm>
           <a:prstGeom prst="rect">
             <a:avLst/>
@@ -3370,21 +3373,367 @@
               <a:buNone/>
             </a:pPr>
             <a:r>
-              <a:rPr kumimoji="0" lang="en-US" altLang="en-US" sz="1300" b="0" i="0" u="none" strike="noStrike" cap="none" normalizeH="0" baseline="0">
-                <a:ln>
-                  <a:noFill/>
-                </a:ln>
+              <a:rPr lang="en-US" altLang="en-US" sz="1300">
+                <a:latin typeface="Arial" panose="020B0604020202020204" pitchFamily="34" charset="0"/>
+              </a:rPr>
+              <a:t> </a:t>
+            </a:r>
+            <a:r>
+              <a:rPr lang="az-Latn-AZ" altLang="en-US" sz="1300">
+                <a:latin typeface="Arial" panose="020B0604020202020204" pitchFamily="34" charset="0"/>
+              </a:rPr>
+              <a:t>İndi, </a:t>
+            </a:r>
+            <a:r>
+              <a:rPr lang="az-Latn-AZ" altLang="en-US" sz="1300" b="1">
+                <a:latin typeface="Arial" panose="020B0604020202020204" pitchFamily="34" charset="0"/>
+              </a:rPr>
+              <a:t>POST</a:t>
+            </a:r>
+            <a:r>
+              <a:rPr lang="az-Latn-AZ" altLang="en-US" sz="1300">
+                <a:latin typeface="Arial" panose="020B0604020202020204" pitchFamily="34" charset="0"/>
+              </a:rPr>
+              <a:t> cədvəlinə əlavə edilən dataları </a:t>
+            </a:r>
+            <a:r>
+              <a:rPr lang="az-Latn-AZ" altLang="en-US" sz="1300" b="1">
+                <a:latin typeface="Arial" panose="020B0604020202020204" pitchFamily="34" charset="0"/>
+              </a:rPr>
+              <a:t>index.blade.php </a:t>
+            </a:r>
+            <a:r>
+              <a:rPr lang="az-Latn-AZ" altLang="en-US" sz="1300">
+                <a:latin typeface="Arial" panose="020B0604020202020204" pitchFamily="34" charset="0"/>
+              </a:rPr>
+              <a:t>səhifəsində göstərəcəyik.</a:t>
+            </a:r>
+            <a:r>
+              <a:rPr lang="en-US" altLang="en-US" sz="1300">
+                <a:latin typeface="Arial" panose="020B0604020202020204" pitchFamily="34" charset="0"/>
+              </a:rPr>
+              <a:t> </a:t>
+            </a:r>
+            <a:r>
+              <a:rPr lang="az-Latn-AZ" altLang="en-US" sz="1300">
+                <a:latin typeface="Arial" panose="020B0604020202020204" pitchFamily="34" charset="0"/>
+              </a:rPr>
+              <a:t>Nəzərə alınacaq əsas şeylərdən birisi şəkilləri əlavə edərkən: </a:t>
+            </a:r>
+            <a:r>
+              <a:rPr lang="az-Latn-AZ" altLang="en-US" sz="1300" b="1">
+                <a:latin typeface="Arial" panose="020B0604020202020204" pitchFamily="34" charset="0"/>
+              </a:rPr>
+              <a:t>php artisan storage:link</a:t>
+            </a:r>
+            <a:r>
+              <a:rPr lang="az-Latn-AZ" altLang="en-US" sz="1300">
+                <a:latin typeface="Arial" panose="020B0604020202020204" pitchFamily="34" charset="0"/>
+              </a:rPr>
+              <a:t> əmrinin verilmiş olmasıdır. Hal hazırki proyektdə bu əmri verməmişik deyə ilk öncə həmin əmri yazırıq terminalda.</a:t>
+            </a:r>
+            <a:endParaRPr lang="en-US" altLang="en-US" sz="1300">
+              <a:latin typeface="Arial" panose="020B0604020202020204" pitchFamily="34" charset="0"/>
+            </a:endParaRPr>
+          </a:p>
+          <a:p>
+            <a:pPr>
+              <a:lnSpc>
+                <a:spcPct val="150000"/>
+              </a:lnSpc>
+              <a:buNone/>
+            </a:pPr>
+            <a:endParaRPr kumimoji="0" lang="en-US" altLang="en-US" sz="1300" b="0" i="0" u="none" strike="noStrike" cap="none" normalizeH="0" baseline="0">
+              <a:ln>
+                <a:noFill/>
+              </a:ln>
+              <a:solidFill>
+                <a:schemeClr val="tx1"/>
+              </a:solidFill>
+              <a:effectLst/>
+              <a:latin typeface="Arial" panose="020B0604020202020204" pitchFamily="34" charset="0"/>
+            </a:endParaRPr>
+          </a:p>
+          <a:p>
+            <a:pPr>
+              <a:lnSpc>
+                <a:spcPct val="150000"/>
+              </a:lnSpc>
+              <a:buNone/>
+            </a:pPr>
+            <a:endParaRPr lang="en-US" altLang="en-US" sz="1300">
+              <a:latin typeface="Arial" panose="020B0604020202020204" pitchFamily="34" charset="0"/>
+            </a:endParaRPr>
+          </a:p>
+          <a:p>
+            <a:pPr>
+              <a:lnSpc>
+                <a:spcPct val="150000"/>
+              </a:lnSpc>
+              <a:buNone/>
+            </a:pPr>
+            <a:endParaRPr kumimoji="0" lang="en-US" altLang="en-US" sz="1300" b="0" i="0" u="none" strike="noStrike" cap="none" normalizeH="0" baseline="0">
+              <a:ln>
+                <a:noFill/>
+              </a:ln>
+              <a:solidFill>
+                <a:schemeClr val="tx1"/>
+              </a:solidFill>
+              <a:effectLst/>
+              <a:latin typeface="Arial" panose="020B0604020202020204" pitchFamily="34" charset="0"/>
+            </a:endParaRPr>
+          </a:p>
+          <a:p>
+            <a:pPr>
+              <a:lnSpc>
+                <a:spcPct val="150000"/>
+              </a:lnSpc>
+              <a:buNone/>
+            </a:pPr>
+            <a:endParaRPr lang="en-US" altLang="en-US" sz="1300">
+              <a:latin typeface="Arial" panose="020B0604020202020204" pitchFamily="34" charset="0"/>
+            </a:endParaRPr>
+          </a:p>
+          <a:p>
+            <a:pPr>
+              <a:lnSpc>
+                <a:spcPct val="150000"/>
+              </a:lnSpc>
+              <a:buNone/>
+            </a:pPr>
+            <a:endParaRPr kumimoji="0" lang="en-US" altLang="en-US" sz="1300" b="0" i="0" u="none" strike="noStrike" cap="none" normalizeH="0" baseline="0">
+              <a:ln>
+                <a:noFill/>
+              </a:ln>
+              <a:solidFill>
+                <a:schemeClr val="tx1"/>
+              </a:solidFill>
+              <a:effectLst/>
+              <a:latin typeface="Arial" panose="020B0604020202020204" pitchFamily="34" charset="0"/>
+            </a:endParaRPr>
+          </a:p>
+          <a:p>
+            <a:pPr>
+              <a:lnSpc>
+                <a:spcPct val="150000"/>
+              </a:lnSpc>
+              <a:buNone/>
+            </a:pPr>
+            <a:endParaRPr lang="en-US" altLang="en-US" sz="1300">
+              <a:latin typeface="Arial" panose="020B0604020202020204" pitchFamily="34" charset="0"/>
+            </a:endParaRPr>
+          </a:p>
+          <a:p>
+            <a:pPr>
+              <a:lnSpc>
+                <a:spcPct val="150000"/>
+              </a:lnSpc>
+              <a:buNone/>
+            </a:pPr>
+            <a:endParaRPr kumimoji="0" lang="en-US" altLang="en-US" sz="1300" b="0" i="0" u="none" strike="noStrike" cap="none" normalizeH="0" baseline="0">
+              <a:ln>
+                <a:noFill/>
+              </a:ln>
+              <a:solidFill>
+                <a:schemeClr val="tx1"/>
+              </a:solidFill>
+              <a:effectLst/>
+              <a:latin typeface="Arial" panose="020B0604020202020204" pitchFamily="34" charset="0"/>
+            </a:endParaRPr>
+          </a:p>
+          <a:p>
+            <a:pPr>
+              <a:lnSpc>
+                <a:spcPct val="150000"/>
+              </a:lnSpc>
+              <a:buNone/>
+            </a:pPr>
+            <a:endParaRPr lang="en-US" altLang="en-US" sz="1300">
+              <a:latin typeface="Arial" panose="020B0604020202020204" pitchFamily="34" charset="0"/>
+            </a:endParaRPr>
+          </a:p>
+          <a:p>
+            <a:pPr>
+              <a:lnSpc>
+                <a:spcPct val="150000"/>
+              </a:lnSpc>
+              <a:buNone/>
+            </a:pPr>
+            <a:endParaRPr kumimoji="0" lang="en-US" altLang="en-US" sz="1300" b="0" i="0" u="none" strike="noStrike" cap="none" normalizeH="0" baseline="0">
+              <a:ln>
+                <a:noFill/>
+              </a:ln>
+              <a:solidFill>
+                <a:schemeClr val="tx1"/>
+              </a:solidFill>
+              <a:effectLst/>
+              <a:latin typeface="Arial" panose="020B0604020202020204" pitchFamily="34" charset="0"/>
+            </a:endParaRPr>
+          </a:p>
+          <a:p>
+            <a:pPr>
+              <a:lnSpc>
+                <a:spcPct val="150000"/>
+              </a:lnSpc>
+            </a:pPr>
+            <a:r>
+              <a:rPr lang="en-US" altLang="en-US" sz="1300">
+                <a:latin typeface="Arial" panose="020B0604020202020204" pitchFamily="34" charset="0"/>
+              </a:rPr>
+              <a:t>B</a:t>
+            </a:r>
+            <a:r>
+              <a:rPr lang="az-Latn-AZ" altLang="en-US" sz="1300">
+                <a:latin typeface="Arial" panose="020B0604020202020204" pitchFamily="34" charset="0"/>
+              </a:rPr>
+              <a:t>irdə ki, </a:t>
+            </a:r>
+            <a:r>
+              <a:rPr lang="az-Latn-AZ" altLang="en-US" sz="1300" b="1">
                 <a:solidFill>
-                  <a:schemeClr val="tx1"/>
+                  <a:srgbClr val="FF0000"/>
+                </a:solidFill>
+                <a:latin typeface="Arial" panose="020B0604020202020204" pitchFamily="34" charset="0"/>
+              </a:rPr>
+              <a:t>.env </a:t>
+            </a:r>
+            <a:r>
+              <a:rPr lang="az-Latn-AZ" altLang="en-US" sz="1300">
+                <a:latin typeface="Arial" panose="020B0604020202020204" pitchFamily="34" charset="0"/>
+              </a:rPr>
+              <a:t>faylında </a:t>
+            </a:r>
+            <a:r>
+              <a:rPr lang="en-US" sz="1400" b="0">
+                <a:solidFill>
+                  <a:srgbClr val="F92672"/>
                 </a:solidFill>
                 <a:effectLst/>
+                <a:latin typeface="Consolas" panose="020B0609020204030204" pitchFamily="49" charset="0"/>
+              </a:rPr>
+              <a:t>FILESYSTEM_DISK</a:t>
+            </a:r>
+            <a:r>
+              <a:rPr lang="az-Latn-AZ" altLang="en-US" sz="1300">
                 <a:latin typeface="Arial" panose="020B0604020202020204" pitchFamily="34" charset="0"/>
               </a:rPr>
-              <a:t>.</a:t>
-            </a:r>
-          </a:p>
-        </p:txBody>
-      </p:sp>
+              <a:t> dəyərini </a:t>
+            </a:r>
+            <a:r>
+              <a:rPr lang="az-Latn-AZ" altLang="en-US" sz="1300" b="1">
+                <a:solidFill>
+                  <a:srgbClr val="00B050"/>
+                </a:solidFill>
+                <a:latin typeface="Arial" panose="020B0604020202020204" pitchFamily="34" charset="0"/>
+              </a:rPr>
+              <a:t>local</a:t>
+            </a:r>
+            <a:r>
+              <a:rPr lang="az-Latn-AZ" altLang="en-US" sz="1300">
+                <a:latin typeface="Arial" panose="020B0604020202020204" pitchFamily="34" charset="0"/>
+              </a:rPr>
+              <a:t> -dan </a:t>
+            </a:r>
+            <a:r>
+              <a:rPr lang="az-Latn-AZ" altLang="en-US" sz="1300" b="1">
+                <a:solidFill>
+                  <a:srgbClr val="0070C0"/>
+                </a:solidFill>
+                <a:latin typeface="Arial" panose="020B0604020202020204" pitchFamily="34" charset="0"/>
+              </a:rPr>
+              <a:t>public</a:t>
+            </a:r>
+            <a:r>
+              <a:rPr lang="az-Latn-AZ" altLang="en-US" sz="1300">
+                <a:latin typeface="Arial" panose="020B0604020202020204" pitchFamily="34" charset="0"/>
+              </a:rPr>
+              <a:t> -ə dəyişirik. Əks halda, </a:t>
+            </a:r>
+            <a:r>
+              <a:rPr lang="az-Latn-AZ" altLang="en-US" sz="1300" b="1">
+                <a:latin typeface="Arial" panose="020B0604020202020204" pitchFamily="34" charset="0"/>
+              </a:rPr>
+              <a:t>post</a:t>
+            </a:r>
+            <a:r>
+              <a:rPr lang="az-Latn-AZ" altLang="en-US" sz="1300">
+                <a:latin typeface="Arial" panose="020B0604020202020204" pitchFamily="34" charset="0"/>
+              </a:rPr>
+              <a:t> əlavə etdiyimizdə şəkilləri heç qovluğa yükləyə bilmərik.</a:t>
+            </a:r>
+            <a:endParaRPr kumimoji="0" lang="en-US" altLang="en-US" sz="1300" b="0" i="0" u="none" strike="noStrike" cap="none" normalizeH="0" baseline="0">
+              <a:ln>
+                <a:noFill/>
+              </a:ln>
+              <a:solidFill>
+                <a:schemeClr val="tx1"/>
+              </a:solidFill>
+              <a:effectLst/>
+              <a:latin typeface="Arial" panose="020B0604020202020204" pitchFamily="34" charset="0"/>
+            </a:endParaRPr>
+          </a:p>
+        </p:txBody>
+      </p:sp>
+      <p:pic>
+        <p:nvPicPr>
+          <p:cNvPr id="4" name="Picture 3">
+            <a:extLst>
+              <a:ext uri="{FF2B5EF4-FFF2-40B4-BE49-F238E27FC236}">
+                <a16:creationId xmlns:a16="http://schemas.microsoft.com/office/drawing/2014/main" id="{5B776EC8-74B1-3F5D-2494-94941E5C2F5D}"/>
+              </a:ext>
+            </a:extLst>
+          </p:cNvPr>
+          <p:cNvPicPr>
+            <a:picLocks noChangeAspect="1"/>
+          </p:cNvPicPr>
+          <p:nvPr/>
+        </p:nvPicPr>
+        <p:blipFill>
+          <a:blip r:embed="rId2"/>
+          <a:stretch>
+            <a:fillRect/>
+          </a:stretch>
+        </p:blipFill>
+        <p:spPr>
+          <a:xfrm>
+            <a:off x="217714" y="1205577"/>
+            <a:ext cx="9888330" cy="1629002"/>
+          </a:xfrm>
+          <a:prstGeom prst="rect">
+            <a:avLst/>
+          </a:prstGeom>
+        </p:spPr>
+      </p:pic>
+      <p:pic>
+        <p:nvPicPr>
+          <p:cNvPr id="6" name="Picture 5">
+            <a:extLst>
+              <a:ext uri="{FF2B5EF4-FFF2-40B4-BE49-F238E27FC236}">
+                <a16:creationId xmlns:a16="http://schemas.microsoft.com/office/drawing/2014/main" id="{D57CD7C9-991B-45B6-7051-66DC650FE6E0}"/>
+              </a:ext>
+            </a:extLst>
+          </p:cNvPr>
+          <p:cNvPicPr>
+            <a:picLocks noChangeAspect="1"/>
+          </p:cNvPicPr>
+          <p:nvPr/>
+        </p:nvPicPr>
+        <p:blipFill>
+          <a:blip r:embed="rId3"/>
+          <a:stretch>
+            <a:fillRect/>
+          </a:stretch>
+        </p:blipFill>
+        <p:spPr>
+          <a:xfrm>
+            <a:off x="217714" y="4042473"/>
+            <a:ext cx="3181794" cy="1609950"/>
+          </a:xfrm>
+          <a:prstGeom prst="rect">
+            <a:avLst/>
+          </a:prstGeom>
+        </p:spPr>
+      </p:pic>
     </p:spTree>
     <p:extLst>
       <p:ext uri="{BB962C8B-B14F-4D97-AF65-F5344CB8AC3E}">
@@ -3456,21 +3805,90 @@
               <a:buNone/>
             </a:pPr>
             <a:r>
-              <a:rPr kumimoji="0" lang="en-US" altLang="en-US" sz="1300" b="0" i="0" u="none" strike="noStrike" cap="none" normalizeH="0" baseline="0">
-                <a:ln>
-                  <a:noFill/>
-                </a:ln>
-                <a:solidFill>
-                  <a:schemeClr val="tx1"/>
-                </a:solidFill>
-                <a:effectLst/>
+              <a:rPr lang="az-Latn-AZ" altLang="en-US" sz="1300">
                 <a:latin typeface="Arial" panose="020B0604020202020204" pitchFamily="34" charset="0"/>
               </a:rPr>
-              <a:t>.</a:t>
-            </a:r>
-          </a:p>
-        </p:txBody>
-      </p:sp>
+              <a:t>Faydalı qeyd: İnput taglərini </a:t>
+            </a:r>
+            <a:r>
+              <a:rPr lang="az-Latn-AZ" altLang="en-US" sz="1300" b="1">
+                <a:latin typeface="Arial" panose="020B0604020202020204" pitchFamily="34" charset="0"/>
+              </a:rPr>
+              <a:t>auto</a:t>
+            </a:r>
+            <a:r>
+              <a:rPr lang="az-Latn-AZ" altLang="en-US" sz="1300">
+                <a:latin typeface="Arial" panose="020B0604020202020204" pitchFamily="34" charset="0"/>
+              </a:rPr>
+              <a:t> doldurmaq üçün </a:t>
+            </a:r>
+            <a:r>
+              <a:rPr lang="az-Latn-AZ" altLang="en-US" sz="1300" b="1">
+                <a:latin typeface="Arial" panose="020B0604020202020204" pitchFamily="34" charset="0"/>
+              </a:rPr>
+              <a:t>Fake Filler </a:t>
+            </a:r>
+            <a:r>
+              <a:rPr lang="az-Latn-AZ" altLang="en-US" sz="1300">
+                <a:latin typeface="Arial" panose="020B0604020202020204" pitchFamily="34" charset="0"/>
+              </a:rPr>
+              <a:t>adlı </a:t>
+            </a:r>
+            <a:r>
+              <a:rPr lang="az-Latn-AZ" altLang="en-US" sz="1300" b="1">
+                <a:latin typeface="Arial" panose="020B0604020202020204" pitchFamily="34" charset="0"/>
+              </a:rPr>
+              <a:t>chrome</a:t>
+            </a:r>
+            <a:r>
+              <a:rPr lang="az-Latn-AZ" altLang="en-US" sz="1300">
+                <a:latin typeface="Arial" panose="020B0604020202020204" pitchFamily="34" charset="0"/>
+              </a:rPr>
+              <a:t> alətini yükləyə bilərsiz.</a:t>
+            </a:r>
+            <a:endParaRPr kumimoji="0" lang="en-US" altLang="en-US" sz="1300" b="0" i="0" u="none" strike="noStrike" cap="none" normalizeH="0" baseline="0">
+              <a:ln>
+                <a:noFill/>
+              </a:ln>
+              <a:solidFill>
+                <a:schemeClr val="tx1"/>
+              </a:solidFill>
+              <a:effectLst/>
+              <a:latin typeface="Arial" panose="020B0604020202020204" pitchFamily="34" charset="0"/>
+            </a:endParaRPr>
+          </a:p>
+        </p:txBody>
+      </p:sp>
+      <p:pic>
+        <p:nvPicPr>
+          <p:cNvPr id="4" name="Picture 3">
+            <a:extLst>
+              <a:ext uri="{FF2B5EF4-FFF2-40B4-BE49-F238E27FC236}">
+                <a16:creationId xmlns:a16="http://schemas.microsoft.com/office/drawing/2014/main" id="{A8CFFA3B-1533-ADC2-F70E-300FF72A2D3B}"/>
+              </a:ext>
+            </a:extLst>
+          </p:cNvPr>
+          <p:cNvPicPr>
+            <a:picLocks noChangeAspect="1"/>
+          </p:cNvPicPr>
+          <p:nvPr/>
+        </p:nvPicPr>
+        <p:blipFill>
+          <a:blip r:embed="rId2"/>
+          <a:stretch>
+            <a:fillRect/>
+          </a:stretch>
+        </p:blipFill>
+        <p:spPr>
+          <a:xfrm>
+            <a:off x="0" y="1578400"/>
+            <a:ext cx="12192000" cy="5279600"/>
+          </a:xfrm>
+          <a:prstGeom prst="rect">
+            <a:avLst/>
+          </a:prstGeom>
+        </p:spPr>
+      </p:pic>
     </p:spTree>
     <p:extLst>
       <p:ext uri="{BB962C8B-B14F-4D97-AF65-F5344CB8AC3E}">
@@ -3521,8 +3939,8 @@
         </p:nvSpPr>
         <p:spPr>
           <a:xfrm>
-            <a:off x="217714" y="255046"/>
-            <a:ext cx="11756571" cy="355354"/>
+            <a:off x="217714" y="124418"/>
+            <a:ext cx="11756571" cy="568810"/>
           </a:xfrm>
           <a:prstGeom prst="rect">
             <a:avLst/>
@@ -3542,21 +3960,90 @@
               <a:buNone/>
             </a:pPr>
             <a:r>
-              <a:rPr kumimoji="0" lang="en-US" altLang="en-US" sz="1300" b="0" i="0" u="none" strike="noStrike" cap="none" normalizeH="0" baseline="0">
-                <a:ln>
-                  <a:noFill/>
-                </a:ln>
-                <a:solidFill>
-                  <a:schemeClr val="tx1"/>
-                </a:solidFill>
-                <a:effectLst/>
+              <a:rPr lang="en-US" altLang="en-US" sz="1100">
                 <a:latin typeface="Arial" panose="020B0604020202020204" pitchFamily="34" charset="0"/>
               </a:rPr>
-              <a:t>.</a:t>
-            </a:r>
-          </a:p>
-        </p:txBody>
-      </p:sp>
+              <a:t>Post m</a:t>
+            </a:r>
+            <a:r>
+              <a:rPr lang="az-Latn-AZ" altLang="en-US" sz="1100">
+                <a:latin typeface="Arial" panose="020B0604020202020204" pitchFamily="34" charset="0"/>
+              </a:rPr>
+              <a:t>əlumatlarını ekrana çap edirik. </a:t>
+            </a:r>
+            <a:r>
+              <a:rPr lang="az-Latn-AZ" altLang="en-US" sz="1100" b="1">
+                <a:solidFill>
+                  <a:srgbClr val="FF0000"/>
+                </a:solidFill>
+                <a:latin typeface="Arial" panose="020B0604020202020204" pitchFamily="34" charset="0"/>
+              </a:rPr>
+              <a:t>category_id </a:t>
+            </a:r>
+            <a:r>
+              <a:rPr lang="az-Latn-AZ" altLang="en-US" sz="1100">
+                <a:latin typeface="Arial" panose="020B0604020202020204" pitchFamily="34" charset="0"/>
+              </a:rPr>
+              <a:t>olan yeri sonra düzəldəcəyik. Hələki bu cür qalsın. </a:t>
+            </a:r>
+            <a:r>
+              <a:rPr lang="az-Latn-AZ" altLang="en-US" sz="1100" b="1">
+                <a:solidFill>
+                  <a:srgbClr val="FF0000"/>
+                </a:solidFill>
+                <a:latin typeface="Arial" panose="020B0604020202020204" pitchFamily="34" charset="0"/>
+              </a:rPr>
+              <a:t>strtotime</a:t>
+            </a:r>
+            <a:r>
+              <a:rPr lang="az-Latn-AZ" altLang="en-US" sz="1100">
+                <a:latin typeface="Arial" panose="020B0604020202020204" pitchFamily="34" charset="0"/>
+              </a:rPr>
+              <a:t> — funksiyası PHP-də mətn (string) formatında verilmiş bir tarixi ifadəni, Unix zaman damğasına (timestamp) çevirən funksiyadır. Bu zaman damğası, 1 Yanvar 1970 UTC tarixindən etibarən keçmiş olan saniyə sayını göstərir.</a:t>
+            </a:r>
+            <a:endParaRPr kumimoji="0" lang="en-US" altLang="en-US" sz="1100" b="0" i="0" u="none" strike="noStrike" cap="none" normalizeH="0" baseline="0">
+              <a:ln>
+                <a:noFill/>
+              </a:ln>
+              <a:solidFill>
+                <a:schemeClr val="tx1"/>
+              </a:solidFill>
+              <a:effectLst/>
+              <a:latin typeface="Arial" panose="020B0604020202020204" pitchFamily="34" charset="0"/>
+            </a:endParaRPr>
+          </a:p>
+        </p:txBody>
+      </p:sp>
+      <p:pic>
+        <p:nvPicPr>
+          <p:cNvPr id="4" name="Picture 3">
+            <a:extLst>
+              <a:ext uri="{FF2B5EF4-FFF2-40B4-BE49-F238E27FC236}">
+                <a16:creationId xmlns:a16="http://schemas.microsoft.com/office/drawing/2014/main" id="{3894F599-93BF-2B05-6108-5CECEA2A413F}"/>
+              </a:ext>
+            </a:extLst>
+          </p:cNvPr>
+          <p:cNvPicPr>
+            <a:picLocks noChangeAspect="1"/>
+          </p:cNvPicPr>
+          <p:nvPr/>
+        </p:nvPicPr>
+        <p:blipFill>
+          <a:blip r:embed="rId2"/>
+          <a:stretch>
+            <a:fillRect/>
+          </a:stretch>
+        </p:blipFill>
+        <p:spPr>
+          <a:xfrm>
+            <a:off x="0" y="811275"/>
+            <a:ext cx="12192000" cy="6046725"/>
+          </a:xfrm>
+          <a:prstGeom prst="rect">
+            <a:avLst/>
+          </a:prstGeom>
+        </p:spPr>
+      </p:pic>
     </p:spTree>
     <p:extLst>
       <p:ext uri="{BB962C8B-B14F-4D97-AF65-F5344CB8AC3E}">
@@ -3571,6 +4058,446 @@
 </file>
 
 <file path=ppt/slides/slide4.xml><?xml version="1.0" encoding="utf-8"?>
+<p:sld xmlns:a="http://schemas.openxmlformats.org/drawingml/2006/main" xmlns:r="http://schemas.openxmlformats.org/officeDocument/2006/relationships" xmlns:p="http://schemas.openxmlformats.org/presentationml/2006/main">
+  <p:cSld>
+    <p:spTree>
+      <p:nvGrpSpPr>
+        <p:cNvPr id="1" name="">
+          <a:extLst>
+            <a:ext uri="{FF2B5EF4-FFF2-40B4-BE49-F238E27FC236}">
+              <a16:creationId xmlns:a16="http://schemas.microsoft.com/office/drawing/2014/main" id="{E0A0AAF9-DC63-7DAC-5F8E-BDA93E1BB487}"/>
+            </a:ext>
+          </a:extLst>
+        </p:cNvPr>
+        <p:cNvGrpSpPr/>
+        <p:nvPr/>
+      </p:nvGrpSpPr>
+      <p:grpSpPr>
+        <a:xfrm>
+          <a:off x="0" y="0"/>
+          <a:ext cx="0" cy="0"/>
+          <a:chOff x="0" y="0"/>
+          <a:chExt cx="0" cy="0"/>
+        </a:xfrm>
+      </p:grpSpPr>
+      <p:sp>
+        <p:nvSpPr>
+          <p:cNvPr id="3" name="TextBox 2">
+            <a:extLst>
+              <a:ext uri="{FF2B5EF4-FFF2-40B4-BE49-F238E27FC236}">
+                <a16:creationId xmlns:a16="http://schemas.microsoft.com/office/drawing/2014/main" id="{39987CF8-37E0-803E-DA7D-B837CF4DBF80}"/>
+              </a:ext>
+            </a:extLst>
+          </p:cNvPr>
+          <p:cNvSpPr txBox="1"/>
+          <p:nvPr/>
+        </p:nvSpPr>
+        <p:spPr>
+          <a:xfrm>
+            <a:off x="217714" y="255046"/>
+            <a:ext cx="11756571" cy="2155847"/>
+          </a:xfrm>
+          <a:prstGeom prst="rect">
+            <a:avLst/>
+          </a:prstGeom>
+          <a:noFill/>
+        </p:spPr>
+        <p:txBody>
+          <a:bodyPr wrap="square">
+            <a:spAutoFit/>
+          </a:bodyPr>
+          <a:lstStyle/>
+          <a:p>
+            <a:pPr>
+              <a:lnSpc>
+                <a:spcPct val="150000"/>
+              </a:lnSpc>
+              <a:buNone/>
+            </a:pPr>
+            <a:r>
+              <a:rPr kumimoji="0" lang="en-US" altLang="en-US" sz="1300" b="1" i="0" u="none" strike="noStrike" cap="none" normalizeH="0" baseline="0">
+                <a:ln>
+                  <a:noFill/>
+                </a:ln>
+                <a:solidFill>
+                  <a:schemeClr val="tx1"/>
+                </a:solidFill>
+                <a:effectLst/>
+                <a:latin typeface="Arial" panose="020B0604020202020204" pitchFamily="34" charset="0"/>
+              </a:rPr>
+              <a:t>Əsas məqsədləri</a:t>
+            </a:r>
+            <a:r>
+              <a:rPr kumimoji="0" lang="en-US" altLang="en-US" sz="1300" b="0" i="0" u="none" strike="noStrike" cap="none" normalizeH="0" baseline="0">
+                <a:ln>
+                  <a:noFill/>
+                </a:ln>
+                <a:solidFill>
+                  <a:schemeClr val="tx1"/>
+                </a:solidFill>
+                <a:effectLst/>
+                <a:latin typeface="Arial" panose="020B0604020202020204" pitchFamily="34" charset="0"/>
+              </a:rPr>
+              <a:t>:</a:t>
+            </a:r>
+          </a:p>
+          <a:p>
+            <a:pPr marL="742950" lvl="1" indent="-285750">
+              <a:lnSpc>
+                <a:spcPct val="150000"/>
+              </a:lnSpc>
+              <a:buFont typeface="Wingdings" panose="05000000000000000000" pitchFamily="2" charset="2"/>
+              <a:buChar char="q"/>
+            </a:pPr>
+            <a:r>
+              <a:rPr kumimoji="0" lang="en-US" altLang="en-US" sz="1300" b="0" i="0" u="none" strike="noStrike" cap="none" normalizeH="0" baseline="0">
+                <a:ln>
+                  <a:noFill/>
+                </a:ln>
+                <a:solidFill>
+                  <a:schemeClr val="tx1"/>
+                </a:solidFill>
+                <a:effectLst/>
+                <a:latin typeface="Arial" panose="020B0604020202020204" pitchFamily="34" charset="0"/>
+              </a:rPr>
+              <a:t>Verilən tarixi "timestamp" formatına çevirmək</a:t>
+            </a:r>
+          </a:p>
+          <a:p>
+            <a:pPr marL="742950" lvl="1" indent="-285750">
+              <a:lnSpc>
+                <a:spcPct val="150000"/>
+              </a:lnSpc>
+              <a:buFont typeface="Wingdings" panose="05000000000000000000" pitchFamily="2" charset="2"/>
+              <a:buChar char="q"/>
+            </a:pPr>
+            <a:endParaRPr kumimoji="0" lang="en-US" altLang="en-US" sz="1300" b="0" i="0" u="none" strike="noStrike" cap="none" normalizeH="0" baseline="0">
+              <a:ln>
+                <a:noFill/>
+              </a:ln>
+              <a:solidFill>
+                <a:schemeClr val="tx1"/>
+              </a:solidFill>
+              <a:effectLst/>
+              <a:latin typeface="Arial" panose="020B0604020202020204" pitchFamily="34" charset="0"/>
+            </a:endParaRPr>
+          </a:p>
+          <a:p>
+            <a:pPr marL="742950" lvl="1" indent="-285750">
+              <a:lnSpc>
+                <a:spcPct val="150000"/>
+              </a:lnSpc>
+              <a:buFont typeface="Wingdings" panose="05000000000000000000" pitchFamily="2" charset="2"/>
+              <a:buChar char="q"/>
+            </a:pPr>
+            <a:r>
+              <a:rPr kumimoji="0" lang="en-US" altLang="en-US" sz="1300" b="0" i="0" u="none" strike="noStrike" cap="none" normalizeH="0" baseline="0">
+                <a:ln>
+                  <a:noFill/>
+                </a:ln>
+                <a:solidFill>
+                  <a:schemeClr val="tx1"/>
+                </a:solidFill>
+                <a:effectLst/>
+                <a:latin typeface="Arial" panose="020B0604020202020204" pitchFamily="34" charset="0"/>
+              </a:rPr>
+              <a:t>Tarix üzərində riyazi əməliyyatlar aparmaq (gün, ay, il, saat və s. əlavə etmək və ya çıxmaq)</a:t>
+            </a:r>
+          </a:p>
+          <a:p>
+            <a:pPr marL="742950" lvl="1" indent="-285750">
+              <a:lnSpc>
+                <a:spcPct val="150000"/>
+              </a:lnSpc>
+              <a:buFont typeface="Wingdings" panose="05000000000000000000" pitchFamily="2" charset="2"/>
+              <a:buChar char="q"/>
+            </a:pPr>
+            <a:endParaRPr kumimoji="0" lang="en-US" altLang="en-US" sz="1300" b="0" i="0" u="none" strike="noStrike" cap="none" normalizeH="0" baseline="0">
+              <a:ln>
+                <a:noFill/>
+              </a:ln>
+              <a:solidFill>
+                <a:schemeClr val="tx1"/>
+              </a:solidFill>
+              <a:effectLst/>
+              <a:latin typeface="Arial" panose="020B0604020202020204" pitchFamily="34" charset="0"/>
+            </a:endParaRPr>
+          </a:p>
+          <a:p>
+            <a:pPr marL="742950" lvl="1" indent="-285750">
+              <a:lnSpc>
+                <a:spcPct val="150000"/>
+              </a:lnSpc>
+              <a:buFont typeface="Wingdings" panose="05000000000000000000" pitchFamily="2" charset="2"/>
+              <a:buChar char="q"/>
+            </a:pPr>
+            <a:r>
+              <a:rPr kumimoji="0" lang="en-US" altLang="en-US" sz="1300" b="0" i="0" u="none" strike="noStrike" cap="none" normalizeH="0" baseline="0">
+                <a:ln>
+                  <a:noFill/>
+                </a:ln>
+                <a:solidFill>
+                  <a:schemeClr val="tx1"/>
+                </a:solidFill>
+                <a:effectLst/>
+                <a:latin typeface="Arial" panose="020B0604020202020204" pitchFamily="34" charset="0"/>
+              </a:rPr>
+              <a:t>Dinamik tarix hesablamaları aparmaq (məsələn: "next Monday", "+1 week", "-2 days" və s.)</a:t>
+            </a:r>
+          </a:p>
+          <a:p>
+            <a:pPr>
+              <a:lnSpc>
+                <a:spcPct val="150000"/>
+              </a:lnSpc>
+              <a:buNone/>
+            </a:pPr>
+            <a:endParaRPr kumimoji="0" lang="en-US" altLang="en-US" sz="1300" b="0" i="0" u="none" strike="noStrike" cap="none" normalizeH="0" baseline="0">
+              <a:ln>
+                <a:noFill/>
+              </a:ln>
+              <a:solidFill>
+                <a:schemeClr val="tx1"/>
+              </a:solidFill>
+              <a:effectLst/>
+              <a:latin typeface="Arial" panose="020B0604020202020204" pitchFamily="34" charset="0"/>
+            </a:endParaRPr>
+          </a:p>
+        </p:txBody>
+      </p:sp>
+    </p:spTree>
+    <p:extLst>
+      <p:ext uri="{BB962C8B-B14F-4D97-AF65-F5344CB8AC3E}">
+        <p14:creationId xmlns:p14="http://schemas.microsoft.com/office/powerpoint/2010/main" val="1699853197"/>
+      </p:ext>
+    </p:extLst>
+  </p:cSld>
+  <p:clrMapOvr>
+    <a:masterClrMapping/>
+  </p:clrMapOvr>
+</p:sld>
+</file>
+
+<file path=ppt/slides/slide5.xml><?xml version="1.0" encoding="utf-8"?>
+<p:sld xmlns:a="http://schemas.openxmlformats.org/drawingml/2006/main" xmlns:r="http://schemas.openxmlformats.org/officeDocument/2006/relationships" xmlns:p="http://schemas.openxmlformats.org/presentationml/2006/main">
+  <p:cSld>
+    <p:spTree>
+      <p:nvGrpSpPr>
+        <p:cNvPr id="1" name="">
+          <a:extLst>
+            <a:ext uri="{FF2B5EF4-FFF2-40B4-BE49-F238E27FC236}">
+              <a16:creationId xmlns:a16="http://schemas.microsoft.com/office/drawing/2014/main" id="{6915A6EC-20E4-DB3F-FC21-C44866C7FBE2}"/>
+            </a:ext>
+          </a:extLst>
+        </p:cNvPr>
+        <p:cNvGrpSpPr/>
+        <p:nvPr/>
+      </p:nvGrpSpPr>
+      <p:grpSpPr>
+        <a:xfrm>
+          <a:off x="0" y="0"/>
+          <a:ext cx="0" cy="0"/>
+          <a:chOff x="0" y="0"/>
+          <a:chExt cx="0" cy="0"/>
+        </a:xfrm>
+      </p:grpSpPr>
+      <p:sp>
+        <p:nvSpPr>
+          <p:cNvPr id="3" name="TextBox 2">
+            <a:extLst>
+              <a:ext uri="{FF2B5EF4-FFF2-40B4-BE49-F238E27FC236}">
+                <a16:creationId xmlns:a16="http://schemas.microsoft.com/office/drawing/2014/main" id="{DF7DE368-ADE7-28C1-491C-BA5572E614F3}"/>
+              </a:ext>
+            </a:extLst>
+          </p:cNvPr>
+          <p:cNvSpPr txBox="1"/>
+          <p:nvPr/>
+        </p:nvSpPr>
+        <p:spPr>
+          <a:xfrm>
+            <a:off x="217714" y="255046"/>
+            <a:ext cx="11756571" cy="355354"/>
+          </a:xfrm>
+          <a:prstGeom prst="rect">
+            <a:avLst/>
+          </a:prstGeom>
+          <a:noFill/>
+        </p:spPr>
+        <p:txBody>
+          <a:bodyPr wrap="square">
+            <a:spAutoFit/>
+          </a:bodyPr>
+          <a:lstStyle/>
+          <a:p>
+            <a:pPr>
+              <a:lnSpc>
+                <a:spcPct val="150000"/>
+              </a:lnSpc>
+              <a:buNone/>
+            </a:pPr>
+            <a:r>
+              <a:rPr lang="az-Latn-AZ" altLang="en-US" sz="1300">
+                <a:latin typeface="Arial" panose="020B0604020202020204" pitchFamily="34" charset="0"/>
+              </a:rPr>
+              <a:t>Nəticə:</a:t>
+            </a:r>
+            <a:endParaRPr kumimoji="0" lang="en-US" altLang="en-US" sz="1300" b="0" i="0" u="none" strike="noStrike" cap="none" normalizeH="0" baseline="0">
+              <a:ln>
+                <a:noFill/>
+              </a:ln>
+              <a:solidFill>
+                <a:schemeClr val="tx1"/>
+              </a:solidFill>
+              <a:effectLst/>
+              <a:latin typeface="Arial" panose="020B0604020202020204" pitchFamily="34" charset="0"/>
+            </a:endParaRPr>
+          </a:p>
+        </p:txBody>
+      </p:sp>
+      <p:pic>
+        <p:nvPicPr>
+          <p:cNvPr id="4" name="Picture 3">
+            <a:extLst>
+              <a:ext uri="{FF2B5EF4-FFF2-40B4-BE49-F238E27FC236}">
+                <a16:creationId xmlns:a16="http://schemas.microsoft.com/office/drawing/2014/main" id="{77B7ACFF-4C40-EDCB-784D-02942F57DDF4}"/>
+              </a:ext>
+            </a:extLst>
+          </p:cNvPr>
+          <p:cNvPicPr>
+            <a:picLocks noChangeAspect="1"/>
+          </p:cNvPicPr>
+          <p:nvPr/>
+        </p:nvPicPr>
+        <p:blipFill>
+          <a:blip r:embed="rId2"/>
+          <a:stretch>
+            <a:fillRect/>
+          </a:stretch>
+        </p:blipFill>
+        <p:spPr>
+          <a:xfrm>
+            <a:off x="0" y="1376881"/>
+            <a:ext cx="12192000" cy="4104238"/>
+          </a:xfrm>
+          <a:prstGeom prst="rect">
+            <a:avLst/>
+          </a:prstGeom>
+          <a:ln w="38100" cap="sq">
+            <a:solidFill>
+              <a:srgbClr val="000000"/>
+            </a:solidFill>
+            <a:prstDash val="solid"/>
+            <a:miter lim="800000"/>
+          </a:ln>
+          <a:effectLst>
+            <a:outerShdw blurRad="50800" dist="38100" dir="2700000" algn="tl" rotWithShape="0">
+              <a:srgbClr val="000000">
+                <a:alpha val="43000"/>
+              </a:srgbClr>
+            </a:outerShdw>
+          </a:effectLst>
+        </p:spPr>
+      </p:pic>
+    </p:spTree>
+    <p:extLst>
+      <p:ext uri="{BB962C8B-B14F-4D97-AF65-F5344CB8AC3E}">
+        <p14:creationId xmlns:p14="http://schemas.microsoft.com/office/powerpoint/2010/main" val="449586389"/>
+      </p:ext>
+    </p:extLst>
+  </p:cSld>
+  <p:clrMapOvr>
+    <a:masterClrMapping/>
+  </p:clrMapOvr>
+</p:sld>
+</file>
+
+<file path=ppt/slides/slide6.xml><?xml version="1.0" encoding="utf-8"?>
+<p:sld xmlns:a="http://schemas.openxmlformats.org/drawingml/2006/main" xmlns:r="http://schemas.openxmlformats.org/officeDocument/2006/relationships" xmlns:p="http://schemas.openxmlformats.org/presentationml/2006/main">
+  <p:cSld>
+    <p:spTree>
+      <p:nvGrpSpPr>
+        <p:cNvPr id="1" name="">
+          <a:extLst>
+            <a:ext uri="{FF2B5EF4-FFF2-40B4-BE49-F238E27FC236}">
+              <a16:creationId xmlns:a16="http://schemas.microsoft.com/office/drawing/2014/main" id="{9C989952-E1B4-4A4E-C8C4-2EBB0F215135}"/>
+            </a:ext>
+          </a:extLst>
+        </p:cNvPr>
+        <p:cNvGrpSpPr/>
+        <p:nvPr/>
+      </p:nvGrpSpPr>
+      <p:grpSpPr>
+        <a:xfrm>
+          <a:off x="0" y="0"/>
+          <a:ext cx="0" cy="0"/>
+          <a:chOff x="0" y="0"/>
+          <a:chExt cx="0" cy="0"/>
+        </a:xfrm>
+      </p:grpSpPr>
+      <p:sp>
+        <p:nvSpPr>
+          <p:cNvPr id="3" name="TextBox 2">
+            <a:extLst>
+              <a:ext uri="{FF2B5EF4-FFF2-40B4-BE49-F238E27FC236}">
+                <a16:creationId xmlns:a16="http://schemas.microsoft.com/office/drawing/2014/main" id="{872ADDE0-9021-36DA-5399-B58B2F29599B}"/>
+              </a:ext>
+            </a:extLst>
+          </p:cNvPr>
+          <p:cNvSpPr txBox="1"/>
+          <p:nvPr/>
+        </p:nvSpPr>
+        <p:spPr>
+          <a:xfrm>
+            <a:off x="217714" y="255046"/>
+            <a:ext cx="11756571" cy="355354"/>
+          </a:xfrm>
+          <a:prstGeom prst="rect">
+            <a:avLst/>
+          </a:prstGeom>
+          <a:noFill/>
+        </p:spPr>
+        <p:txBody>
+          <a:bodyPr wrap="square">
+            <a:spAutoFit/>
+          </a:bodyPr>
+          <a:lstStyle/>
+          <a:p>
+            <a:pPr>
+              <a:lnSpc>
+                <a:spcPct val="150000"/>
+              </a:lnSpc>
+              <a:buNone/>
+            </a:pPr>
+            <a:r>
+              <a:rPr kumimoji="0" lang="en-US" altLang="en-US" sz="1300" b="0" i="0" u="none" strike="noStrike" cap="none" normalizeH="0" baseline="0">
+                <a:ln>
+                  <a:noFill/>
+                </a:ln>
+                <a:solidFill>
+                  <a:schemeClr val="tx1"/>
+                </a:solidFill>
+                <a:effectLst/>
+                <a:latin typeface="Arial" panose="020B0604020202020204" pitchFamily="34" charset="0"/>
+              </a:rPr>
+              <a:t>.</a:t>
+            </a:r>
+          </a:p>
+        </p:txBody>
+      </p:sp>
+    </p:spTree>
+    <p:extLst>
+      <p:ext uri="{BB962C8B-B14F-4D97-AF65-F5344CB8AC3E}">
+        <p14:creationId xmlns:p14="http://schemas.microsoft.com/office/powerpoint/2010/main" val="1114824844"/>
+      </p:ext>
+    </p:extLst>
+  </p:cSld>
+  <p:clrMapOvr>
+    <a:masterClrMapping/>
+  </p:clrMapOvr>
+</p:sld>
+</file>
+
+<file path=ppt/slides/slide7.xml><?xml version="1.0" encoding="utf-8"?>
 <p:sld xmlns:a="http://schemas.openxmlformats.org/drawingml/2006/main" xmlns:r="http://schemas.openxmlformats.org/officeDocument/2006/relationships" xmlns:p="http://schemas.openxmlformats.org/presentationml/2006/main">
   <p:cSld>
     <p:spTree>
